--- a/system-design-101/vi/lessons/sd-11-005/slides/sd-11-005.pptx
+++ b/system-design-101/vi/lessons/sd-11-005/slides/sd-11-005.pptx
@@ -10032,7 +10032,7 @@
       </p:sp>
       <p:sp>
         <p:nvSpPr>
-          <p:cNvPr id="7" name="Text richtext-1792420888907-176092491"/>
+          <p:cNvPr id="7" name="Text 5"/>
           <p:cNvSpPr/>
           <p:nvPr/>
         </p:nvSpPr>
@@ -10051,13 +10051,11 @@
           <a:bodyPr wrap="square" lIns="0" tIns="0" rIns="0" bIns="0" rtlCol="0" anchor="ctr"/>
           <a:lstStyle/>
           <a:p>
-            <a:pPr algn="l" marL="361950" indent="-258592">
+            <a:pPr algn="l" indent="0" marL="0">
               <a:spcAft>
                 <a:spcPts val="1950"/>
               </a:spcAft>
-              <a:buSzPct val="100000"/>
-              <a:buFont typeface="Arial"/>
-              <a:buChar char="•"/>
+              <a:buNone/>
             </a:pPr>
             <a:r>
               <a:rPr lang="en-US" sz="2850" b="1" dirty="0" spc="2" kern="0">
@@ -10117,13 +10115,11 @@
             <a:endParaRPr lang="en-US" sz="2850" dirty="0"/>
           </a:p>
           <a:p>
-            <a:pPr algn="l" marL="361950" indent="-258592">
+            <a:pPr algn="l" indent="0" marL="0">
               <a:spcAft>
                 <a:spcPts val="1950"/>
               </a:spcAft>
-              <a:buSzPct val="100000"/>
-              <a:buFont typeface="Arial"/>
-              <a:buChar char="•"/>
+              <a:buNone/>
             </a:pPr>
             <a:r>
               <a:rPr lang="en-US" sz="2850" b="1" dirty="0" spc="-1" kern="0">
@@ -10183,10 +10179,8 @@
             <a:endParaRPr lang="en-US" sz="2850" dirty="0"/>
           </a:p>
           <a:p>
-            <a:pPr algn="l" marL="361950" indent="-258592">
-              <a:buSzPct val="100000"/>
-              <a:buFont typeface="Arial"/>
-              <a:buChar char="•"/>
+            <a:pPr algn="l" indent="0" marL="0">
+              <a:buNone/>
             </a:pPr>
             <a:r>
               <a:rPr lang="en-US" sz="2850" b="1" dirty="0" spc="-50" kern="0">
@@ -10233,7 +10227,7 @@
               <a:t> quán:</a:t>
             </a:r>
             <a:r>
-              <a:rPr lang="en-US" sz="2850" b="1" dirty="0" spc="-5" kern="0">
+              <a:rPr lang="en-US" sz="2850" b="1" dirty="0" spc="-2" kern="0">
                 <a:solidFill>
                   <a:srgbClr val="14161C"/>
                 </a:solidFill>
@@ -10241,18 +10235,7 @@
                 <a:ea typeface="Be Vietnam Pro" pitchFamily="34" charset="-122"/>
                 <a:cs typeface="Be Vietnam Pro" pitchFamily="34" charset="-120"/>
               </a:rPr>
-              <a:t> khoảng</a:t>
-            </a:r>
-            <a:r>
-              <a:rPr lang="en-US" sz="2850" b="1" dirty="0" spc="2" kern="0">
-                <a:solidFill>
-                  <a:srgbClr val="14161C"/>
-                </a:solidFill>
-                <a:latin typeface="Be Vietnam Pro" pitchFamily="34" charset="0"/>
-                <a:ea typeface="Be Vietnam Pro" pitchFamily="34" charset="-122"/>
-                <a:cs typeface="Be Vietnam Pro" pitchFamily="34" charset="-120"/>
-              </a:rPr>
-              <a:t> 22%</a:t>
+              <a:t> 19,9%</a:t>
             </a:r>
             <a:endParaRPr lang="en-US" sz="2850" dirty="0"/>
           </a:p>
